--- a/design_presenstasjon.pptx
+++ b/design_presenstasjon.pptx
@@ -291,7 +291,7 @@
           <a:p>
             <a:r>
               <a:rPr lang="en-US" dirty="0"/>
-              <a:t>Ca. 30 sek. Åpne med én setning: Vi har beholdt den eksisterende transporten, men bygget et segmentert og overvåkbart overlay oppå den. Målet er å redusere risiko uten å miste dagens funksjonalitet eller kreve store nyanskaffelser.</a:t>
+              <a:t>Vi har beholdt den eksisterende transporten, men bygget et segmentert og overvåkbart overlay oppå den. Målet er å redusere risiko uten å miste dagens funksjonalitet eller kreve store nyanskaffelser.</a:t>
             </a:r>
           </a:p>
         </p:txBody>
@@ -377,8 +377,68 @@
           <a:lstStyle/>
           <a:p>
             <a:r>
+              <a:rPr lang="en-US" dirty="0" err="1"/>
+              <a:t>nettet</a:t>
+            </a:r>
+            <a:r>
               <a:rPr lang="en-US" dirty="0"/>
-              <a:t>Ca. 55 sek. Forklar hvorfor redesign er nødvendig: nettet er flatt, private DHCP-enheter har skapt ustabilitet, og det mangler sentral logging og synlighet. Samtidig må vi gjenbruke eksisterende utstyr og ikke endre det litauiske Layer 3-VPN-et. Designmålet blir derfor å segmentere, begrense, overvåke og standardisere.</a:t>
+              <a:t> er flatt, private DHCP-</a:t>
+            </a:r>
+            <a:r>
+              <a:rPr lang="en-US" dirty="0" err="1"/>
+              <a:t>enheter</a:t>
+            </a:r>
+            <a:r>
+              <a:rPr lang="en-US" dirty="0"/>
+              <a:t> </a:t>
+            </a:r>
+            <a:r>
+              <a:rPr lang="en-US" dirty="0" err="1"/>
+              <a:t>skapte</a:t>
+            </a:r>
+            <a:r>
+              <a:rPr lang="en-US" dirty="0"/>
+              <a:t> ustabilitet, og det </a:t>
+            </a:r>
+            <a:r>
+              <a:rPr lang="en-US" dirty="0" err="1"/>
+              <a:t>manglet</a:t>
+            </a:r>
+            <a:r>
+              <a:rPr lang="en-US" dirty="0"/>
+              <a:t> sentral logging og synlighet. </a:t>
+            </a:r>
+            <a:r>
+              <a:rPr lang="en-US" dirty="0" err="1"/>
+              <a:t>Samtidig</a:t>
+            </a:r>
+            <a:r>
+              <a:rPr lang="en-US" dirty="0"/>
+              <a:t> </a:t>
+            </a:r>
+            <a:r>
+              <a:rPr lang="en-US" dirty="0" err="1"/>
+              <a:t>måtte</a:t>
+            </a:r>
+            <a:r>
+              <a:rPr lang="en-US" dirty="0"/>
+              <a:t> vi gjenbruke eksisterende utstyr og ikke endre det litauiske Layer 3-VPN-et. </a:t>
+            </a:r>
+            <a:r>
+              <a:rPr lang="en-US" dirty="0" err="1"/>
+              <a:t>Designmålet</a:t>
+            </a:r>
+            <a:r>
+              <a:rPr lang="en-US" dirty="0"/>
+              <a:t> </a:t>
+            </a:r>
+            <a:r>
+              <a:rPr lang="en-US" dirty="0" err="1"/>
+              <a:t>blie</a:t>
+            </a:r>
+            <a:r>
+              <a:rPr lang="en-US" dirty="0"/>
+              <a:t> derfor å segmentere, begrense, overvåke og standardisere.</a:t>
             </a:r>
           </a:p>
         </p:txBody>
@@ -465,7 +525,39 @@
           <a:p>
             <a:r>
               <a:rPr lang="en-US" dirty="0"/>
-              <a:t>Ca. 70 sek. Gå fra venstre mot høyre. Den litauiske VPN-en er bare transport og endres ikke. Over den kjører vi separate DMVPN-overlay per VRF. BNHQ er hub og samler sentrale tjenester som AAA, logging, NTP og IDS. Operative overlay beskyttes med IPsec, mens INET ikke trenger samme beskyttelse. Monitoring-trafikk kan speiles med ERSPAN til Security Onion.</a:t>
+              <a:t>Den litauiske VPN-en er bare transport og endres ikke. Over den kjører vi separate DMVPN-overlay per VRF. BNHQ er hub og samler sentrale tjenester som AAA, logging, NTP </a:t>
+            </a:r>
+            <a:r>
+              <a:rPr lang="en-US" dirty="0" err="1"/>
+              <a:t>og</a:t>
+            </a:r>
+            <a:r>
+              <a:rPr lang="en-US" dirty="0"/>
+              <a:t> IDS. Operative overlay beskyttes med IPsec, mens INET ikke trenger samme beskyttelse. Monitoring-</a:t>
+            </a:r>
+            <a:r>
+              <a:rPr lang="en-US" dirty="0" err="1"/>
+              <a:t>trafikk</a:t>
+            </a:r>
+            <a:r>
+              <a:rPr lang="en-US" dirty="0"/>
+              <a:t> </a:t>
+            </a:r>
+            <a:r>
+              <a:rPr lang="en-US" dirty="0" err="1"/>
+              <a:t>speiles</a:t>
+            </a:r>
+            <a:r>
+              <a:rPr lang="en-US" dirty="0"/>
+              <a:t> med ERSPAN </a:t>
+            </a:r>
+            <a:r>
+              <a:rPr lang="en-US" dirty="0" err="1"/>
+              <a:t>til</a:t>
+            </a:r>
+            <a:r>
+              <a:rPr lang="en-US" dirty="0"/>
+              <a:t> IDS.</a:t>
             </a:r>
           </a:p>
         </p:txBody>
@@ -551,8 +643,44 @@
           <a:lstStyle/>
           <a:p>
             <a:r>
+              <a:rPr lang="en-US" dirty="0" err="1"/>
+              <a:t>På</a:t>
+            </a:r>
+            <a:r>
               <a:rPr lang="en-US" dirty="0"/>
-              <a:t>Ca. 65 sek. På hvert site bruker vi samme fem segmenter. VLAN skiller på Layer 2 og VRF skiller rutingtabellene på Layer 3. Adresseplanen er konsekvent: andre oktett er site, tredje identifiserer tjenesten. Trafikk mellom segmenter følger en eksplisitt tjenestematrise, og hver VRF fortsetter videre i sitt eget DMVPN-overlay.</a:t>
+              <a:t> hvert site bruker vi samme fem </a:t>
+            </a:r>
+            <a:r>
+              <a:rPr lang="en-US" dirty="0" err="1"/>
+              <a:t>segmenter</a:t>
+            </a:r>
+            <a:r>
+              <a:rPr lang="en-US" dirty="0"/>
+              <a:t>, </a:t>
+            </a:r>
+            <a:r>
+              <a:rPr lang="en-US" dirty="0" err="1"/>
+              <a:t>hvor</a:t>
+            </a:r>
+            <a:r>
+              <a:rPr lang="en-US" dirty="0"/>
+              <a:t> VLAN skiller på Layer 2 og VRF skiller rutingtabellene på Layer 3. Adresseplanen er </a:t>
+            </a:r>
+            <a:r>
+              <a:rPr lang="en-US" dirty="0" err="1"/>
+              <a:t>konsekvent</a:t>
+            </a:r>
+            <a:r>
+              <a:rPr lang="en-US" dirty="0"/>
+              <a:t>, </a:t>
+            </a:r>
+            <a:r>
+              <a:rPr lang="en-US" dirty="0" err="1"/>
+              <a:t>hvor</a:t>
+            </a:r>
+            <a:r>
+              <a:rPr lang="en-US" dirty="0"/>
+              <a:t> andre oktett er site, tredje identifiserer tjenesten. Trafikk mellom segmenter følger en eksplisitt tjenestematrise, og hver VRF fortsetter videre i sitt eget DMVPN-overlay.</a:t>
             </a:r>
           </a:p>
         </p:txBody>
@@ -638,8 +766,44 @@
           <a:lstStyle/>
           <a:p>
             <a:r>
+              <a:rPr lang="en-US" dirty="0" err="1"/>
+              <a:t>Hvor</a:t>
+            </a:r>
+            <a:r>
               <a:rPr lang="en-US" dirty="0"/>
-              <a:t>Ca. 80 sek. Dette er nøkkelforskjellen fra ren hub-and-spoke. Huben er fortsatt NHRP-server og kontrollpunkt. Første trafikk mellom to spokes kan gå via BNHQ. Huben sender NHRP redirect, og spoke lærer en shortcut. Deretter kan selve datatrafikken gå direkte mellom sites. Det reduserer belastningen på huben og gjør løsningen mer skalerbar.</a:t>
+              <a:t> Huben er NHRP-server </a:t>
+            </a:r>
+            <a:r>
+              <a:rPr lang="en-US" dirty="0" err="1"/>
+              <a:t>og</a:t>
+            </a:r>
+            <a:r>
+              <a:rPr lang="en-US" dirty="0"/>
+              <a:t> </a:t>
+            </a:r>
+            <a:r>
+              <a:rPr lang="en-US" dirty="0" err="1"/>
+              <a:t>kontrollpunkt</a:t>
+            </a:r>
+            <a:r>
+              <a:rPr lang="en-US" dirty="0"/>
+              <a:t> </a:t>
+            </a:r>
+            <a:r>
+              <a:rPr lang="en-US" dirty="0" err="1"/>
+              <a:t>og</a:t>
+            </a:r>
+            <a:r>
+              <a:rPr lang="en-US" dirty="0"/>
+              <a:t> </a:t>
+            </a:r>
+            <a:r>
+              <a:rPr lang="en-US" dirty="0" err="1"/>
+              <a:t>første</a:t>
+            </a:r>
+            <a:r>
+              <a:rPr lang="en-US" dirty="0"/>
+              <a:t> trafikk mellom to spokes kan gå via BNHQ. Huben sender NHRP redirect, og spoke lærer en shortcut. Deretter kan selve datatrafikken gå direkte mellom sites. Det reduserer belastningen på huben og gjør løsningen mer skalerbar.</a:t>
             </a:r>
           </a:p>
         </p:txBody>
@@ -725,8 +889,28 @@
           <a:lstStyle/>
           <a:p>
             <a:r>
+              <a:rPr lang="en-US" dirty="0" err="1"/>
+              <a:t>På</a:t>
+            </a:r>
+            <a:r>
               <a:rPr lang="en-US" dirty="0"/>
-              <a:t>Ca. 70 sek. Presenter sikkerheten lagvis. På accesslaget stopper DHCP Snooping falske DHCP-servere og gir bindinger som DAI og IP Source Guard kan bruke. STP-beskyttelsen hindrer uautoriserte switcher og loops. Administrasjon begrenses til MGMT, skjer over SSH og autentiseres med TACACS+. IPsec beskytter de operative DMVPN-overlayene.</a:t>
+              <a:t> accesslaget stopper DHCP Snooping falske DHCP-servere og gir bindinger som DAI og IP Source Guard kan bruke. STP-beskyttelsen hindrer uautoriserte switcher og loops. Administrasjon begrenses til MGMT, </a:t>
+            </a:r>
+            <a:r>
+              <a:rPr lang="en-US" dirty="0" err="1"/>
+              <a:t>som</a:t>
+            </a:r>
+            <a:r>
+              <a:rPr lang="en-US" dirty="0"/>
+              <a:t> </a:t>
+            </a:r>
+            <a:r>
+              <a:rPr lang="en-US" dirty="0" err="1"/>
+              <a:t>skjer</a:t>
+            </a:r>
+            <a:r>
+              <a:rPr lang="en-US" dirty="0"/>
+              <a:t> over SSH og autentiseres med TACACS+. IPsec beskytter de operative DMVPN-overlayene.</a:t>
             </a:r>
           </a:p>
         </p:txBody>
@@ -813,7 +997,39 @@
           <a:p>
             <a:r>
               <a:rPr lang="en-US" dirty="0"/>
-              <a:t>Ca. 60 sek. Her er det viktig å skille mellom syslog og ERSPAN. Syslog er hendelser fra nettverksenhetene. ERSPAN er kopier av utvalgte datapakker. NTP sørger for felles tid, og TACACS+ gir sentral kontroll på administrativ tilgang. Samlet gir dette langt bedre synlighet enn dagens nett.</a:t>
+              <a:t>Her er det viktig å skille mellom syslog og ERSPAN. Syslog er hendelser fra nettverksenhetene. ERSPAN er kopier av utvalgte datapakker. NTP sørger for felles tid, og TACACS+ gir sentral kontroll på administrativ tilgang. Samlet gir dette langt bedre </a:t>
+            </a:r>
+            <a:r>
+              <a:rPr lang="en-US" dirty="0" err="1"/>
+              <a:t>synlighet</a:t>
+            </a:r>
+            <a:r>
+              <a:rPr lang="en-US" dirty="0"/>
+              <a:t> </a:t>
+            </a:r>
+            <a:r>
+              <a:rPr lang="en-US" dirty="0" err="1"/>
+              <a:t>enn</a:t>
+            </a:r>
+            <a:r>
+              <a:rPr lang="en-US" dirty="0"/>
+              <a:t> </a:t>
+            </a:r>
+            <a:r>
+              <a:rPr lang="en-US" dirty="0" err="1"/>
+              <a:t>nettet</a:t>
+            </a:r>
+            <a:r>
+              <a:rPr lang="en-US" dirty="0"/>
+              <a:t> </a:t>
+            </a:r>
+            <a:r>
+              <a:rPr lang="en-US" dirty="0" err="1"/>
+              <a:t>som</a:t>
+            </a:r>
+            <a:r>
+              <a:rPr lang="en-US" dirty="0"/>
+              <a:t> var.</a:t>
             </a:r>
           </a:p>
         </p:txBody>
@@ -899,8 +1115,28 @@
           <a:lstStyle/>
           <a:p>
             <a:r>
+              <a:rPr lang="en-US" dirty="0" err="1"/>
+              <a:t>Nettverket</a:t>
+            </a:r>
+            <a:r>
               <a:rPr lang="en-US" dirty="0"/>
-              <a:t>Ca. 60 sek. Nettverket skal være mulig å drifte også av neste kontingent. Derfor bruker vi samme site-struktur og samme sikkerhetsbaseline overalt. Excel-malen beskriver site, VLAN, VRF, policy og tjenester, og generatoren lager router- og switch-konfigurasjoner. Nye sites blir derfor mer forutsigbare og mindre avhengige av manuell konfigurasjon.</a:t>
+              <a:t> skal være mulig å </a:t>
+            </a:r>
+            <a:r>
+              <a:rPr lang="en-US" dirty="0" err="1"/>
+              <a:t>driftes</a:t>
+            </a:r>
+            <a:r>
+              <a:rPr lang="en-US" dirty="0"/>
+              <a:t> av de </a:t>
+            </a:r>
+            <a:r>
+              <a:rPr lang="en-US" dirty="0" err="1"/>
+              <a:t>som</a:t>
+            </a:r>
+            <a:r>
+              <a:rPr lang="en-US" dirty="0"/>
+              <a:t> tar over. Derfor bruker vi samme site-struktur og samme sikkerhetsbaseline overalt. Excel-malen beskriver site, VLAN, VRF, policy og tjenester, og generatoren lager router- og switch-konfigurasjoner. Nye sites blir derfor mer forutsigbare og mindre avhengige av manuell konfigurasjon.</a:t>
             </a:r>
           </a:p>
         </p:txBody>
@@ -987,7 +1223,23 @@
           <a:p>
             <a:r>
               <a:rPr lang="en-US" dirty="0"/>
-              <a:t>Ca. 40 sek. Avslutt med hovedpoenget: vi endrer ikke transportnettet, men legger kontroll og sikkerhet i vårt eget overlay. Løsningen gir segmentering, skalerbarhet og synlighet, samtidig som vi gjenbruker eksisterende infrastruktur og standardiserer driften. Stopp her og ta spørsmål.</a:t>
+              <a:t>vi endrer ikke transportnettet, men legger kontroll og sikkerhet i vårt eget overlay. Løsningen gir segmentering, skalerbarhet og synlighet, samtidig som vi gjenbruker eksisterende infrastruktur og </a:t>
+            </a:r>
+            <a:r>
+              <a:rPr lang="en-US" dirty="0" err="1"/>
+              <a:t>standardiserer</a:t>
+            </a:r>
+            <a:r>
+              <a:rPr lang="en-US" dirty="0"/>
+              <a:t> </a:t>
+            </a:r>
+            <a:r>
+              <a:rPr lang="en-US" dirty="0" err="1"/>
+              <a:t>driften</a:t>
+            </a:r>
+            <a:r>
+              <a:rPr lang="en-US" dirty="0"/>
+              <a:t>.</a:t>
             </a:r>
           </a:p>
         </p:txBody>
@@ -1213,7 +1465,7 @@
           </a:prstGeom>
           <a:extLst>
             <a:ext uri="{C572A759-6A51-4108-AA02-DFA0A04FC94B}">
-              <ma14:wrappingTextBoxFlag xmlns:ma14="http://schemas.microsoft.com/office/mac/drawingml/2011/main" xmlns="" val="0"/>
+              <ma14:wrappingTextBoxFlag xmlns="" xmlns:ma14="http://schemas.microsoft.com/office/mac/drawingml/2011/main" val="0"/>
             </a:ext>
           </a:extLst>
         </p:spPr>
@@ -1291,7 +1543,7 @@
           </a:prstGeom>
           <a:extLst>
             <a:ext uri="{C572A759-6A51-4108-AA02-DFA0A04FC94B}">
-              <ma14:wrappingTextBoxFlag xmlns:ma14="http://schemas.microsoft.com/office/mac/drawingml/2011/main" xmlns="" val="0"/>
+              <ma14:wrappingTextBoxFlag xmlns="" xmlns:ma14="http://schemas.microsoft.com/office/mac/drawingml/2011/main" val="0"/>
             </a:ext>
           </a:extLst>
         </p:spPr>
@@ -2440,7 +2692,7 @@
           </a:prstGeom>
           <a:extLst>
             <a:ext uri="{C572A759-6A51-4108-AA02-DFA0A04FC94B}">
-              <ma14:wrappingTextBoxFlag xmlns:ma14="http://schemas.microsoft.com/office/mac/drawingml/2011/main" xmlns="" val="0"/>
+              <ma14:wrappingTextBoxFlag xmlns="" xmlns:ma14="http://schemas.microsoft.com/office/mac/drawingml/2011/main" val="0"/>
             </a:ext>
           </a:extLst>
         </p:spPr>
@@ -3814,7 +4066,7 @@
           </a:prstGeom>
           <a:extLst>
             <a:ext uri="{C572A759-6A51-4108-AA02-DFA0A04FC94B}">
-              <ma14:wrappingTextBoxFlag xmlns:ma14="http://schemas.microsoft.com/office/mac/drawingml/2011/main" xmlns="" val="0"/>
+              <ma14:wrappingTextBoxFlag xmlns="" xmlns:ma14="http://schemas.microsoft.com/office/mac/drawingml/2011/main" val="0"/>
             </a:ext>
           </a:extLst>
         </p:spPr>
@@ -4815,7 +5067,7 @@
           </a:prstGeom>
           <a:extLst>
             <a:ext uri="{C572A759-6A51-4108-AA02-DFA0A04FC94B}">
-              <ma14:wrappingTextBoxFlag xmlns:ma14="http://schemas.microsoft.com/office/mac/drawingml/2011/main" xmlns="" val="0"/>
+              <ma14:wrappingTextBoxFlag xmlns="" xmlns:ma14="http://schemas.microsoft.com/office/mac/drawingml/2011/main" val="0"/>
             </a:ext>
           </a:extLst>
         </p:spPr>
@@ -5700,7 +5952,7 @@
           </a:prstGeom>
           <a:extLst>
             <a:ext uri="{C572A759-6A51-4108-AA02-DFA0A04FC94B}">
-              <ma14:wrappingTextBoxFlag xmlns:ma14="http://schemas.microsoft.com/office/mac/drawingml/2011/main" xmlns="" val="0"/>
+              <ma14:wrappingTextBoxFlag xmlns="" xmlns:ma14="http://schemas.microsoft.com/office/mac/drawingml/2011/main" val="0"/>
             </a:ext>
           </a:extLst>
         </p:spPr>
@@ -7013,7 +7265,7 @@
           </a:prstGeom>
           <a:extLst>
             <a:ext uri="{C572A759-6A51-4108-AA02-DFA0A04FC94B}">
-              <ma14:wrappingTextBoxFlag xmlns:ma14="http://schemas.microsoft.com/office/mac/drawingml/2011/main" xmlns="" val="0"/>
+              <ma14:wrappingTextBoxFlag xmlns="" xmlns:ma14="http://schemas.microsoft.com/office/mac/drawingml/2011/main" val="0"/>
             </a:ext>
           </a:extLst>
         </p:spPr>
@@ -8853,7 +9105,7 @@
           </a:prstGeom>
           <a:extLst>
             <a:ext uri="{C572A759-6A51-4108-AA02-DFA0A04FC94B}">
-              <ma14:wrappingTextBoxFlag xmlns:ma14="http://schemas.microsoft.com/office/mac/drawingml/2011/main" xmlns="" val="0"/>
+              <ma14:wrappingTextBoxFlag xmlns="" xmlns:ma14="http://schemas.microsoft.com/office/mac/drawingml/2011/main" val="0"/>
             </a:ext>
           </a:extLst>
         </p:spPr>
@@ -9463,7 +9715,7 @@
         </p:spPr>
         <p:txBody>
           <a:bodyPr wrap="square" lIns="0" tIns="0" rIns="0" bIns="0" rtlCol="0" anchor="ctr">
-            <a:normAutofit/>
+            <a:normAutofit fontScale="92500" lnSpcReduction="10000"/>
           </a:bodyPr>
           <a:lstStyle/>
           <a:p>
@@ -9476,7 +9728,39 @@
                   <a:srgbClr val="0F172A"/>
                 </a:solidFill>
               </a:rPr>
-              <a:t>Poenget: vi får både hendelseslogger og selve nettverkstrafikken – to komplementære kilder ved feilsøking og hendelseshåndtering.</a:t>
+              <a:t>Poenget: vi får både hendelseslogger og </a:t>
+            </a:r>
+            <a:r>
+              <a:rPr lang="en-US" sz="1140" b="1" dirty="0" err="1">
+                <a:solidFill>
+                  <a:srgbClr val="0F172A"/>
+                </a:solidFill>
+              </a:rPr>
+              <a:t>selve</a:t>
+            </a:r>
+            <a:r>
+              <a:rPr lang="en-US" sz="1140" b="1" dirty="0">
+                <a:solidFill>
+                  <a:srgbClr val="0F172A"/>
+                </a:solidFill>
+              </a:rPr>
+              <a:t> </a:t>
+            </a:r>
+            <a:r>
+              <a:rPr lang="en-US" sz="1140" b="1" dirty="0" err="1">
+                <a:solidFill>
+                  <a:srgbClr val="0F172A"/>
+                </a:solidFill>
+              </a:rPr>
+              <a:t>nettverkstrafikken</a:t>
+            </a:r>
+            <a:r>
+              <a:rPr lang="en-US" sz="1140" b="1" dirty="0">
+                <a:solidFill>
+                  <a:srgbClr val="0F172A"/>
+                </a:solidFill>
+              </a:rPr>
+              <a:t>, to komplementære kilder ved feilsøking og hendelseshåndtering.</a:t>
             </a:r>
             <a:endParaRPr lang="en-US" sz="1140" dirty="0"/>
           </a:p>
@@ -9502,7 +9786,7 @@
           </a:prstGeom>
           <a:extLst>
             <a:ext uri="{C572A759-6A51-4108-AA02-DFA0A04FC94B}">
-              <ma14:wrappingTextBoxFlag xmlns:ma14="http://schemas.microsoft.com/office/mac/drawingml/2011/main" xmlns="" val="0"/>
+              <ma14:wrappingTextBoxFlag xmlns="" xmlns:ma14="http://schemas.microsoft.com/office/mac/drawingml/2011/main" val="0"/>
             </a:ext>
           </a:extLst>
         </p:spPr>
@@ -10657,7 +10941,7 @@
           </a:prstGeom>
           <a:extLst>
             <a:ext uri="{C572A759-6A51-4108-AA02-DFA0A04FC94B}">
-              <ma14:wrappingTextBoxFlag xmlns:ma14="http://schemas.microsoft.com/office/mac/drawingml/2011/main" xmlns="" val="0"/>
+              <ma14:wrappingTextBoxFlag xmlns="" xmlns:ma14="http://schemas.microsoft.com/office/mac/drawingml/2011/main" val="0"/>
             </a:ext>
           </a:extLst>
         </p:spPr>
@@ -11669,7 +11953,7 @@
           </a:prstGeom>
           <a:extLst>
             <a:ext uri="{C572A759-6A51-4108-AA02-DFA0A04FC94B}">
-              <ma14:wrappingTextBoxFlag xmlns:ma14="http://schemas.microsoft.com/office/mac/drawingml/2011/main" xmlns="" val="0"/>
+              <ma14:wrappingTextBoxFlag xmlns="" xmlns:ma14="http://schemas.microsoft.com/office/mac/drawingml/2011/main" val="0"/>
             </a:ext>
           </a:extLst>
         </p:spPr>

--- a/design_presenstasjon.pptx
+++ b/design_presenstasjon.pptx
@@ -378,11 +378,11 @@
           <a:p>
             <a:r>
               <a:rPr lang="en-US" dirty="0" err="1"/>
-              <a:t>nettet</a:t>
+              <a:t>Nettet</a:t>
             </a:r>
             <a:r>
               <a:rPr lang="en-US" dirty="0"/>
-              <a:t> er flatt, private DHCP-</a:t>
+              <a:t> var flatt, private DHCP-</a:t>
             </a:r>
             <a:r>
               <a:rPr lang="en-US" dirty="0" err="1"/>
@@ -434,7 +434,7 @@
             </a:r>
             <a:r>
               <a:rPr lang="en-US" dirty="0" err="1"/>
-              <a:t>blie</a:t>
+              <a:t>ble</a:t>
             </a:r>
             <a:r>
               <a:rPr lang="en-US" dirty="0"/>
@@ -1465,7 +1465,7 @@
           </a:prstGeom>
           <a:extLst>
             <a:ext uri="{C572A759-6A51-4108-AA02-DFA0A04FC94B}">
-              <ma14:wrappingTextBoxFlag xmlns="" xmlns:ma14="http://schemas.microsoft.com/office/mac/drawingml/2011/main" val="0"/>
+              <ma14:wrappingTextBoxFlag xmlns:ma14="http://schemas.microsoft.com/office/mac/drawingml/2011/main" xmlns="" val="0"/>
             </a:ext>
           </a:extLst>
         </p:spPr>
@@ -1543,7 +1543,7 @@
           </a:prstGeom>
           <a:extLst>
             <a:ext uri="{C572A759-6A51-4108-AA02-DFA0A04FC94B}">
-              <ma14:wrappingTextBoxFlag xmlns="" xmlns:ma14="http://schemas.microsoft.com/office/mac/drawingml/2011/main" val="0"/>
+              <ma14:wrappingTextBoxFlag xmlns:ma14="http://schemas.microsoft.com/office/mac/drawingml/2011/main" xmlns="" val="0"/>
             </a:ext>
           </a:extLst>
         </p:spPr>
@@ -2692,7 +2692,7 @@
           </a:prstGeom>
           <a:extLst>
             <a:ext uri="{C572A759-6A51-4108-AA02-DFA0A04FC94B}">
-              <ma14:wrappingTextBoxFlag xmlns="" xmlns:ma14="http://schemas.microsoft.com/office/mac/drawingml/2011/main" val="0"/>
+              <ma14:wrappingTextBoxFlag xmlns:ma14="http://schemas.microsoft.com/office/mac/drawingml/2011/main" xmlns="" val="0"/>
             </a:ext>
           </a:extLst>
         </p:spPr>
@@ -4066,7 +4066,7 @@
           </a:prstGeom>
           <a:extLst>
             <a:ext uri="{C572A759-6A51-4108-AA02-DFA0A04FC94B}">
-              <ma14:wrappingTextBoxFlag xmlns="" xmlns:ma14="http://schemas.microsoft.com/office/mac/drawingml/2011/main" val="0"/>
+              <ma14:wrappingTextBoxFlag xmlns:ma14="http://schemas.microsoft.com/office/mac/drawingml/2011/main" xmlns="" val="0"/>
             </a:ext>
           </a:extLst>
         </p:spPr>
@@ -5067,7 +5067,7 @@
           </a:prstGeom>
           <a:extLst>
             <a:ext uri="{C572A759-6A51-4108-AA02-DFA0A04FC94B}">
-              <ma14:wrappingTextBoxFlag xmlns="" xmlns:ma14="http://schemas.microsoft.com/office/mac/drawingml/2011/main" val="0"/>
+              <ma14:wrappingTextBoxFlag xmlns:ma14="http://schemas.microsoft.com/office/mac/drawingml/2011/main" xmlns="" val="0"/>
             </a:ext>
           </a:extLst>
         </p:spPr>
@@ -5952,7 +5952,7 @@
           </a:prstGeom>
           <a:extLst>
             <a:ext uri="{C572A759-6A51-4108-AA02-DFA0A04FC94B}">
-              <ma14:wrappingTextBoxFlag xmlns="" xmlns:ma14="http://schemas.microsoft.com/office/mac/drawingml/2011/main" val="0"/>
+              <ma14:wrappingTextBoxFlag xmlns:ma14="http://schemas.microsoft.com/office/mac/drawingml/2011/main" xmlns="" val="0"/>
             </a:ext>
           </a:extLst>
         </p:spPr>
@@ -7265,7 +7265,7 @@
           </a:prstGeom>
           <a:extLst>
             <a:ext uri="{C572A759-6A51-4108-AA02-DFA0A04FC94B}">
-              <ma14:wrappingTextBoxFlag xmlns="" xmlns:ma14="http://schemas.microsoft.com/office/mac/drawingml/2011/main" val="0"/>
+              <ma14:wrappingTextBoxFlag xmlns:ma14="http://schemas.microsoft.com/office/mac/drawingml/2011/main" xmlns="" val="0"/>
             </a:ext>
           </a:extLst>
         </p:spPr>
@@ -9105,7 +9105,7 @@
           </a:prstGeom>
           <a:extLst>
             <a:ext uri="{C572A759-6A51-4108-AA02-DFA0A04FC94B}">
-              <ma14:wrappingTextBoxFlag xmlns="" xmlns:ma14="http://schemas.microsoft.com/office/mac/drawingml/2011/main" val="0"/>
+              <ma14:wrappingTextBoxFlag xmlns:ma14="http://schemas.microsoft.com/office/mac/drawingml/2011/main" xmlns="" val="0"/>
             </a:ext>
           </a:extLst>
         </p:spPr>
@@ -9786,7 +9786,7 @@
           </a:prstGeom>
           <a:extLst>
             <a:ext uri="{C572A759-6A51-4108-AA02-DFA0A04FC94B}">
-              <ma14:wrappingTextBoxFlag xmlns="" xmlns:ma14="http://schemas.microsoft.com/office/mac/drawingml/2011/main" val="0"/>
+              <ma14:wrappingTextBoxFlag xmlns:ma14="http://schemas.microsoft.com/office/mac/drawingml/2011/main" xmlns="" val="0"/>
             </a:ext>
           </a:extLst>
         </p:spPr>
@@ -10941,7 +10941,7 @@
           </a:prstGeom>
           <a:extLst>
             <a:ext uri="{C572A759-6A51-4108-AA02-DFA0A04FC94B}">
-              <ma14:wrappingTextBoxFlag xmlns="" xmlns:ma14="http://schemas.microsoft.com/office/mac/drawingml/2011/main" val="0"/>
+              <ma14:wrappingTextBoxFlag xmlns:ma14="http://schemas.microsoft.com/office/mac/drawingml/2011/main" xmlns="" val="0"/>
             </a:ext>
           </a:extLst>
         </p:spPr>
@@ -11953,7 +11953,7 @@
           </a:prstGeom>
           <a:extLst>
             <a:ext uri="{C572A759-6A51-4108-AA02-DFA0A04FC94B}">
-              <ma14:wrappingTextBoxFlag xmlns="" xmlns:ma14="http://schemas.microsoft.com/office/mac/drawingml/2011/main" val="0"/>
+              <ma14:wrappingTextBoxFlag xmlns:ma14="http://schemas.microsoft.com/office/mac/drawingml/2011/main" xmlns="" val="0"/>
             </a:ext>
           </a:extLst>
         </p:spPr>

--- a/design_presenstasjon.pptx
+++ b/design_presenstasjon.pptx
@@ -680,7 +680,15 @@
             </a:r>
             <a:r>
               <a:rPr lang="en-US" dirty="0"/>
-              <a:t> andre oktett er site, tredje identifiserer tjenesten. Trafikk mellom segmenter følger en eksplisitt tjenestematrise, og hver VRF fortsetter videre i sitt eget DMVPN-overlay.</a:t>
+              <a:t> andre oktett er site </a:t>
+            </a:r>
+            <a:r>
+              <a:rPr lang="en-US" dirty="0" err="1"/>
+              <a:t>nummer</a:t>
+            </a:r>
+            <a:r>
+              <a:rPr lang="en-US" dirty="0"/>
+              <a:t>, tredje identifiserer tjenesten. Trafikk mellom segmenter følger en eksplisitt tjenestematrise, og hver VRF fortsetter videre i sitt eget DMVPN-overlay.</a:t>
             </a:r>
           </a:p>
         </p:txBody>

--- a/design_presenstasjon.pptx
+++ b/design_presenstasjon.pptx
@@ -408,6 +408,11 @@
               <a:rPr lang="en-US" dirty="0"/>
               <a:t> sentral logging og synlighet. </a:t>
             </a:r>
+          </a:p>
+          <a:p>
+            <a:endParaRPr lang="en-US" dirty="0"/>
+          </a:p>
+          <a:p>
             <a:r>
               <a:rPr lang="en-US" dirty="0" err="1"/>
               <a:t>Samtidig</a:t>
@@ -422,7 +427,16 @@
             </a:r>
             <a:r>
               <a:rPr lang="en-US" dirty="0"/>
-              <a:t> vi gjenbruke eksisterende utstyr og ikke endre det litauiske Layer 3-VPN-et. </a:t>
+              <a:t> vi gjenbruke eksisterende utstyr og ikke endre det litauiske Layer 3-VPN-et.</a:t>
+            </a:r>
+          </a:p>
+          <a:p>
+            <a:endParaRPr lang="en-US" dirty="0"/>
+          </a:p>
+          <a:p>
+            <a:r>
+              <a:rPr lang="en-US" dirty="0"/>
+              <a:t> </a:t>
             </a:r>
             <a:r>
               <a:rPr lang="en-US" dirty="0" err="1"/>
@@ -525,7 +539,25 @@
           <a:p>
             <a:r>
               <a:rPr lang="en-US" dirty="0"/>
-              <a:t>Den litauiske VPN-en er bare transport og endres ikke. Over den kjører vi separate DMVPN-overlay per VRF. BNHQ er hub og samler sentrale tjenester som AAA, logging, NTP </a:t>
+              <a:t>Den litauiske VPN-en er bare transport og endres ikke. </a:t>
+            </a:r>
+          </a:p>
+          <a:p>
+            <a:endParaRPr lang="en-US" dirty="0"/>
+          </a:p>
+          <a:p>
+            <a:r>
+              <a:rPr lang="en-US" dirty="0"/>
+              <a:t>Over den kjører vi separate DMVPN-overlay per VRF. </a:t>
+            </a:r>
+          </a:p>
+          <a:p>
+            <a:endParaRPr lang="en-US" dirty="0"/>
+          </a:p>
+          <a:p>
+            <a:r>
+              <a:rPr lang="en-US" dirty="0"/>
+              <a:t>BNHQ er hub og samler sentrale tjenester som AAA, logging, NTP </a:t>
             </a:r>
             <a:r>
               <a:rPr lang="en-US" dirty="0" err="1"/>
@@ -533,7 +565,16 @@
             </a:r>
             <a:r>
               <a:rPr lang="en-US" dirty="0"/>
-              <a:t> IDS. Operative overlay beskyttes med IPsec, mens INET ikke trenger samme beskyttelse. Monitoring-</a:t>
+              <a:t> IDS. </a:t>
+            </a:r>
+          </a:p>
+          <a:p>
+            <a:endParaRPr lang="en-US" dirty="0"/>
+          </a:p>
+          <a:p>
+            <a:r>
+              <a:rPr lang="en-US" dirty="0"/>
+              <a:t>Operative overlay beskyttes med IPsec, mens INET ikke trenger samme beskyttelse. Monitoring-</a:t>
             </a:r>
             <a:r>
               <a:rPr lang="en-US" dirty="0" err="1"/>
@@ -664,7 +705,20 @@
             </a:r>
             <a:r>
               <a:rPr lang="en-US" dirty="0"/>
-              <a:t> VLAN skiller på Layer 2 og VRF skiller rutingtabellene på Layer 3. Adresseplanen er </a:t>
+              <a:t> VLAN skiller på Layer 2 og VRF skiller rutingtabellene på Layer 3.</a:t>
+            </a:r>
+          </a:p>
+          <a:p>
+            <a:endParaRPr lang="en-US" dirty="0"/>
+          </a:p>
+          <a:p>
+            <a:r>
+              <a:rPr lang="en-US" dirty="0" err="1"/>
+              <a:t>Adresseplanen</a:t>
+            </a:r>
+            <a:r>
+              <a:rPr lang="en-US" dirty="0"/>
+              <a:t> er </a:t>
             </a:r>
             <a:r>
               <a:rPr lang="en-US" dirty="0" err="1"/>
@@ -688,7 +742,76 @@
             </a:r>
             <a:r>
               <a:rPr lang="en-US" dirty="0"/>
-              <a:t>, tredje identifiserer tjenesten. Trafikk mellom segmenter følger en eksplisitt tjenestematrise, og hver VRF fortsetter videre i sitt eget DMVPN-overlay.</a:t>
+              <a:t> </a:t>
+            </a:r>
+            <a:r>
+              <a:rPr lang="en-US" dirty="0" err="1"/>
+              <a:t>og</a:t>
+            </a:r>
+            <a:r>
+              <a:rPr lang="en-US" dirty="0"/>
+              <a:t> </a:t>
+            </a:r>
+            <a:r>
+              <a:rPr lang="en-US" dirty="0" err="1"/>
+              <a:t>tredje</a:t>
+            </a:r>
+            <a:r>
+              <a:rPr lang="en-US" dirty="0"/>
+              <a:t> </a:t>
+            </a:r>
+            <a:r>
+              <a:rPr lang="en-US" dirty="0" err="1"/>
+              <a:t>identifiserer</a:t>
+            </a:r>
+            <a:r>
+              <a:rPr lang="en-US" dirty="0"/>
+              <a:t> </a:t>
+            </a:r>
+            <a:r>
+              <a:rPr lang="en-US" dirty="0" err="1"/>
+              <a:t>tjenesten</a:t>
+            </a:r>
+            <a:r>
+              <a:rPr lang="en-US" dirty="0"/>
+              <a:t>/</a:t>
+            </a:r>
+            <a:r>
+              <a:rPr lang="en-US" dirty="0" err="1"/>
+              <a:t>vlan</a:t>
+            </a:r>
+            <a:r>
+              <a:rPr lang="en-US" dirty="0"/>
+              <a:t>. </a:t>
+            </a:r>
+          </a:p>
+          <a:p>
+            <a:endParaRPr lang="en-US" dirty="0"/>
+          </a:p>
+          <a:p>
+            <a:r>
+              <a:rPr lang="en-US" dirty="0" err="1"/>
+              <a:t>Trafikk</a:t>
+            </a:r>
+            <a:r>
+              <a:rPr lang="en-US" dirty="0"/>
+              <a:t> mellom segmenter følger en </a:t>
+            </a:r>
+            <a:r>
+              <a:rPr lang="en-US" dirty="0" err="1"/>
+              <a:t>eksplisitt</a:t>
+            </a:r>
+            <a:r>
+              <a:rPr lang="en-US" dirty="0"/>
+              <a:t> </a:t>
+            </a:r>
+            <a:r>
+              <a:rPr lang="en-US" dirty="0" err="1"/>
+              <a:t>tjenestematrise</a:t>
+            </a:r>
+            <a:r>
+              <a:rPr lang="en-US" dirty="0"/>
+              <a:t> (ACL), og hver VRF fortsetter videre i sitt eget DMVPN-overlay.</a:t>
             </a:r>
           </a:p>
         </p:txBody>
@@ -811,7 +934,38 @@
             </a:r>
             <a:r>
               <a:rPr lang="en-US" dirty="0"/>
-              <a:t> trafikk mellom to spokes kan gå via BNHQ. Huben sender NHRP redirect, og spoke lærer en shortcut. Deretter kan selve datatrafikken gå direkte mellom sites. Det reduserer belastningen på huben og gjør løsningen mer skalerbar.</a:t>
+              <a:t> trafikk mellom to spokes kan gå via BNHQ. </a:t>
+            </a:r>
+          </a:p>
+          <a:p>
+            <a:endParaRPr lang="en-US" dirty="0"/>
+          </a:p>
+          <a:p>
+            <a:r>
+              <a:rPr lang="en-US" dirty="0"/>
+              <a:t>Huben sender NHRP redirect, og spoke lærer en shortcut. </a:t>
+            </a:r>
+          </a:p>
+          <a:p>
+            <a:endParaRPr lang="en-US" dirty="0"/>
+          </a:p>
+          <a:p>
+            <a:r>
+              <a:rPr lang="en-US" dirty="0" err="1"/>
+              <a:t>Deretter</a:t>
+            </a:r>
+            <a:r>
+              <a:rPr lang="en-US" dirty="0"/>
+              <a:t> kan selve datatrafikken gå direkte mellom sites. </a:t>
+            </a:r>
+          </a:p>
+          <a:p>
+            <a:endParaRPr lang="en-US" dirty="0"/>
+          </a:p>
+          <a:p>
+            <a:r>
+              <a:rPr lang="en-US" dirty="0"/>
+              <a:t>Det reduserer belastningen på huben og gjør løsningen mer skalerbar.</a:t>
             </a:r>
           </a:p>
         </p:txBody>
@@ -902,7 +1056,37 @@
             </a:r>
             <a:r>
               <a:rPr lang="en-US" dirty="0"/>
-              <a:t> accesslaget stopper DHCP Snooping falske DHCP-servere og gir bindinger som DAI og IP Source Guard kan bruke. STP-beskyttelsen hindrer uautoriserte switcher og loops. Administrasjon begrenses til MGMT, </a:t>
+              <a:t> accesslaget stopper DHCP Snooping falske DHCP-servere og gir bindinger som DAI og IP Source Guard kan bruke. </a:t>
+            </a:r>
+          </a:p>
+          <a:p>
+            <a:endParaRPr lang="en-US" dirty="0"/>
+          </a:p>
+          <a:p>
+            <a:r>
+              <a:rPr lang="en-US" dirty="0"/>
+              <a:t>STP-</a:t>
+            </a:r>
+            <a:r>
+              <a:rPr lang="en-US" dirty="0" err="1"/>
+              <a:t>beskyttelsen</a:t>
+            </a:r>
+            <a:r>
+              <a:rPr lang="en-US" dirty="0"/>
+              <a:t> hindrer uautoriserte switcher og loops. </a:t>
+            </a:r>
+          </a:p>
+          <a:p>
+            <a:endParaRPr lang="en-US" dirty="0"/>
+          </a:p>
+          <a:p>
+            <a:r>
+              <a:rPr lang="en-US" dirty="0" err="1"/>
+              <a:t>Administrasjon</a:t>
+            </a:r>
+            <a:r>
+              <a:rPr lang="en-US" dirty="0"/>
+              <a:t> begrenses til MGMT, </a:t>
             </a:r>
             <a:r>
               <a:rPr lang="en-US" dirty="0" err="1"/>
@@ -918,7 +1102,15 @@
             </a:r>
             <a:r>
               <a:rPr lang="en-US" dirty="0"/>
-              <a:t> over SSH og autentiseres med TACACS+. IPsec beskytter de operative DMVPN-overlayene.</a:t>
+              <a:t> over SSH og autentiseres med TACACS+ </a:t>
+            </a:r>
+            <a:r>
+              <a:rPr lang="en-US" dirty="0" err="1"/>
+              <a:t>og</a:t>
+            </a:r>
+            <a:r>
+              <a:rPr lang="en-US" dirty="0"/>
+              <a:t> IPsec beskytter de operative DMVPN-overlayene.</a:t>
             </a:r>
           </a:p>
         </p:txBody>
@@ -1005,7 +1197,50 @@
           <a:p>
             <a:r>
               <a:rPr lang="en-US" dirty="0"/>
-              <a:t>Her er det viktig å skille mellom syslog og ERSPAN. Syslog er hendelser fra nettverksenhetene. ERSPAN er kopier av utvalgte datapakker. NTP sørger for felles tid, og TACACS+ gir sentral kontroll på administrativ tilgang. Samlet gir dette langt bedre </a:t>
+              <a:t>Her er det viktig å skille mellom syslog og ERSPAN. </a:t>
+            </a:r>
+          </a:p>
+          <a:p>
+            <a:endParaRPr lang="en-US" dirty="0"/>
+          </a:p>
+          <a:p>
+            <a:r>
+              <a:rPr lang="en-US" dirty="0"/>
+              <a:t>Syslog er hendelser fra nettverksenhetene. ERSPAN er kopier av utvalgte </a:t>
+            </a:r>
+            <a:r>
+              <a:rPr lang="en-US" dirty="0" err="1"/>
+              <a:t>datapakker</a:t>
+            </a:r>
+            <a:r>
+              <a:rPr lang="en-US" dirty="0"/>
+              <a:t>. </a:t>
+            </a:r>
+          </a:p>
+          <a:p>
+            <a:endParaRPr lang="en-US" dirty="0"/>
+          </a:p>
+          <a:p>
+            <a:r>
+              <a:rPr lang="en-US" dirty="0"/>
+              <a:t>NTP sørger for felles tid, og TACACS+ gir sentral kontroll på administrativ </a:t>
+            </a:r>
+            <a:r>
+              <a:rPr lang="en-US" dirty="0" err="1"/>
+              <a:t>tilgang</a:t>
+            </a:r>
+            <a:r>
+              <a:rPr lang="en-US" dirty="0"/>
+              <a:t>.</a:t>
+            </a:r>
+          </a:p>
+          <a:p>
+            <a:endParaRPr lang="en-US" dirty="0"/>
+          </a:p>
+          <a:p>
+            <a:r>
+              <a:rPr lang="en-US" dirty="0"/>
+              <a:t>Samlet gir dette langt bedre </a:t>
             </a:r>
             <a:r>
               <a:rPr lang="en-US" dirty="0" err="1"/>
@@ -1144,7 +1379,70 @@
             </a:r>
             <a:r>
               <a:rPr lang="en-US" dirty="0"/>
-              <a:t> tar over. Derfor bruker vi samme site-struktur og samme sikkerhetsbaseline overalt. Excel-malen beskriver site, VLAN, VRF, policy og tjenester, og generatoren lager router- og switch-konfigurasjoner. Nye sites blir derfor mer forutsigbare og mindre avhengige av manuell konfigurasjon.</a:t>
+              <a:t> tar over, </a:t>
+            </a:r>
+            <a:r>
+              <a:rPr lang="en-US" dirty="0" err="1"/>
+              <a:t>altså</a:t>
+            </a:r>
+            <a:r>
+              <a:rPr lang="en-US" dirty="0"/>
+              <a:t> </a:t>
+            </a:r>
+            <a:r>
+              <a:rPr lang="en-US" dirty="0" err="1"/>
+              <a:t>neste</a:t>
+            </a:r>
+            <a:r>
+              <a:rPr lang="en-US" dirty="0"/>
+              <a:t> </a:t>
+            </a:r>
+            <a:r>
+              <a:rPr lang="en-US" dirty="0" err="1"/>
+              <a:t>kontigent</a:t>
+            </a:r>
+            <a:r>
+              <a:rPr lang="en-US" dirty="0"/>
+              <a:t>. </a:t>
+            </a:r>
+          </a:p>
+          <a:p>
+            <a:endParaRPr lang="en-US" dirty="0"/>
+          </a:p>
+          <a:p>
+            <a:r>
+              <a:rPr lang="en-US" dirty="0" err="1"/>
+              <a:t>Derfor</a:t>
+            </a:r>
+            <a:r>
+              <a:rPr lang="en-US" dirty="0"/>
+              <a:t> bruker vi samme site-struktur og samme sikkerhetsbaseline overalt. </a:t>
+            </a:r>
+          </a:p>
+          <a:p>
+            <a:endParaRPr lang="en-US" dirty="0"/>
+          </a:p>
+          <a:p>
+            <a:r>
+              <a:rPr lang="en-US" dirty="0"/>
+              <a:t>Excel-</a:t>
+            </a:r>
+            <a:r>
+              <a:rPr lang="en-US" dirty="0" err="1"/>
+              <a:t>malen</a:t>
+            </a:r>
+            <a:r>
+              <a:rPr lang="en-US" dirty="0"/>
+              <a:t> beskriver site, VLAN, VRF, policy og tjenester, og generatoren lager router- og switch-konfigurasjoner. </a:t>
+            </a:r>
+          </a:p>
+          <a:p>
+            <a:endParaRPr lang="en-US" dirty="0"/>
+          </a:p>
+          <a:p>
+            <a:r>
+              <a:rPr lang="en-US" dirty="0"/>
+              <a:t>Nye sites blir derfor mer forutsigbare og mindre avhengige av manuell konfigurasjon.</a:t>
             </a:r>
           </a:p>
         </p:txBody>
@@ -1231,7 +1529,20 @@
           <a:p>
             <a:r>
               <a:rPr lang="en-US" dirty="0"/>
-              <a:t>vi endrer ikke transportnettet, men legger kontroll og sikkerhet i vårt eget overlay. Løsningen gir segmentering, skalerbarhet og synlighet, samtidig som vi gjenbruker eksisterende infrastruktur og </a:t>
+              <a:t>Vi endrer ikke transportnettet, men legger kontroll og sikkerhet i vårt eget overlay. </a:t>
+            </a:r>
+          </a:p>
+          <a:p>
+            <a:endParaRPr lang="en-US" dirty="0"/>
+          </a:p>
+          <a:p>
+            <a:r>
+              <a:rPr lang="en-US" dirty="0" err="1"/>
+              <a:t>Løsningen</a:t>
+            </a:r>
+            <a:r>
+              <a:rPr lang="en-US" dirty="0"/>
+              <a:t> gir segmentering, skalerbarhet og synlighet, samtidig som vi gjenbruker eksisterende infrastruktur og </a:t>
             </a:r>
             <a:r>
               <a:rPr lang="en-US" dirty="0" err="1"/>
